--- a/material/Sesion-04-Blockchain-Web3.pptx
+++ b/material/Sesion-04-Blockchain-Web3.pptx
@@ -2480,7 +2480,7 @@
           <a:p>
             <a:r>
               <a:rPr lang="en-US" dirty="0"/>
-              <a:t/>
+              <a:t>Leer el objetivo en voz alta y las cuatro preguntas. Anunciar que al cierre del bloque A cada una tendrá respuesta, y que las cuatro entran en el Quiz 1. 2 minutos.</a:t>
             </a:r>
             <a:endParaRPr lang="en-US" dirty="0"/>
           </a:p>
@@ -2832,7 +2832,7 @@
           <a:p>
             <a:r>
               <a:rPr lang="en-US" dirty="0"/>
-              <a:t/>
+              <a:t>Aquí se cambia al deck Actividad-04-El-caso-Estonia-DECK. Antes, dar las láminas 34-35 para conectar la actividad con la teoría de hoy. Conformar los equipos de proyecto si no están ya. 1 minuto.</a:t>
             </a:r>
             <a:endParaRPr lang="en-US" dirty="0"/>
           </a:p>
@@ -3008,7 +3008,7 @@
           <a:p>
             <a:r>
               <a:rPr lang="en-US" dirty="0"/>
-              <a:t/>
+              <a:t>Después de la pausa. Guardar teléfonos y apuntes antes de repartir. Explicar las reglas de la lámina siguiente y arrancar el reloj: 30 minutos exactos.</a:t>
             </a:r>
             <a:endParaRPr lang="en-US" dirty="0"/>
           </a:p>
@@ -3184,7 +3184,7 @@
           <a:p>
             <a:r>
               <a:rPr lang="en-US" dirty="0"/>
-              <a:t/>
+              <a:t>Últimos 5-8 minutos, con el quiz ya recogido. No se resuelve nada aquí: se explica qué hay, dónde está la guía en PDF y cómo saber que terminaron (32 pruebas en verde).</a:t>
             </a:r>
             <a:endParaRPr lang="en-US" dirty="0"/>
           </a:p>
@@ -3448,7 +3448,7 @@
           <a:p>
             <a:r>
               <a:rPr lang="en-US" dirty="0"/>
-              <a:t/>
+              <a:t>No se explica ahora: es el mapa de siglas de hoy. Pedir que la fotografíen o la tengan abierta; cada término se desarrolla en su lámina. Señalar que PoW, PoS y finalidad entran en el Quiz 1. 1 minuto.</a:t>
             </a:r>
             <a:endParaRPr lang="en-US" dirty="0"/>
           </a:p>
@@ -3800,7 +3800,7 @@
           <a:p>
             <a:r>
               <a:rPr lang="en-US" dirty="0"/>
-              <a:t/>
+              <a:t>Leer la frase en voz alta y cerrar. Recordar: la próxima sesión abre con las exposiciones de Estonia (5 minutos por equipo) y el laboratorio 04 se trae resuelto. 1 minuto.</a:t>
             </a:r>
             <a:endParaRPr lang="en-US" dirty="0"/>
           </a:p>
@@ -3888,7 +3888,7 @@
           <a:p>
             <a:r>
               <a:rPr lang="en-US" dirty="0"/>
-              <a:t/>
+              <a:t>Entrada al bloque A, unos 80 minutos. Recordar la pregunta de la lámina 6 antes de mostrarla: si la S3 dejó una cadena que se valida sola, ¿qué falta? Dejar 30 segundos para respuestas y avanzar. 1 minuto.</a:t>
             </a:r>
             <a:endParaRPr lang="en-US" dirty="0"/>
           </a:p>
@@ -31739,14 +31739,14 @@
       </p:sp>
       <p:sp>
         <p:nvSpPr>
-          <p:cNvPr id="19" name="Shape 16"/>
-          <p:cNvSpPr/>
-          <p:nvPr/>
-        </p:nvSpPr>
-        <p:spPr>
-          <a:xfrm>
-            <a:off x="566928" y="5943600"/>
-            <a:ext cx="11057839" cy="457200"/>
+          <p:cNvPr id="20" name="Shape 16"/>
+          <p:cNvSpPr/>
+          <p:nvPr/>
+        </p:nvSpPr>
+        <p:spPr>
+          <a:xfrm>
+            <a:off x="566928" y="5815584"/>
+            <a:ext cx="11057839" cy="384048"/>
           </a:xfrm>
           <a:prstGeom prst="rect">
             <a:avLst/>
@@ -31764,14 +31764,14 @@
       </p:sp>
       <p:sp>
         <p:nvSpPr>
-          <p:cNvPr id="20" name="Text 17"/>
-          <p:cNvSpPr/>
-          <p:nvPr/>
-        </p:nvSpPr>
-        <p:spPr>
-          <a:xfrm>
-            <a:off x="731520" y="6016752"/>
-            <a:ext cx="10728655" cy="310896"/>
+          <p:cNvPr id="21" name="Text 17"/>
+          <p:cNvSpPr/>
+          <p:nvPr/>
+        </p:nvSpPr>
+        <p:spPr>
+          <a:xfrm>
+            <a:off x="731520" y="5888736"/>
+            <a:ext cx="10728655" cy="237744"/>
           </a:xfrm>
           <a:prstGeom prst="rect">
             <a:avLst/>
@@ -45348,7 +45348,7 @@
         <p:spPr>
           <a:xfrm>
             <a:off x="566928" y="1737360"/>
-            <a:ext cx="11057839" cy="822960"/>
+            <a:ext cx="11057839" cy="685800"/>
           </a:xfrm>
           <a:prstGeom prst="rect">
             <a:avLst/>
@@ -45389,7 +45389,7 @@
         </p:nvSpPr>
         <p:spPr>
           <a:xfrm>
-            <a:off x="566928" y="2788920"/>
+            <a:off x="566928" y="2926080"/>
             <a:ext cx="1463040" cy="640080"/>
           </a:xfrm>
           <a:prstGeom prst="rect">
@@ -45414,7 +45414,7 @@
         </p:nvSpPr>
         <p:spPr>
           <a:xfrm>
-            <a:off x="658368" y="2788920"/>
+            <a:off x="658368" y="2926080"/>
             <a:ext cx="1280160" cy="640080"/>
           </a:xfrm>
           <a:prstGeom prst="rect">
@@ -45453,7 +45453,7 @@
         </p:nvSpPr>
         <p:spPr>
           <a:xfrm>
-            <a:off x="2029968" y="3108960"/>
+            <a:off x="2029968" y="3246120"/>
             <a:ext cx="640080" cy="914"/>
           </a:xfrm>
           <a:prstGeom prst="line">
@@ -45477,7 +45477,7 @@
         </p:nvSpPr>
         <p:spPr>
           <a:xfrm>
-            <a:off x="2670048" y="2788920"/>
+            <a:off x="2670048" y="2926080"/>
             <a:ext cx="1463040" cy="640080"/>
           </a:xfrm>
           <a:prstGeom prst="rect">
@@ -45502,7 +45502,7 @@
         </p:nvSpPr>
         <p:spPr>
           <a:xfrm>
-            <a:off x="2761488" y="2788920"/>
+            <a:off x="2761488" y="2926080"/>
             <a:ext cx="1280160" cy="640080"/>
           </a:xfrm>
           <a:prstGeom prst="rect">
@@ -45541,7 +45541,7 @@
         </p:nvSpPr>
         <p:spPr>
           <a:xfrm flipV="1">
-            <a:off x="4133088" y="2606040"/>
+            <a:off x="4133088" y="2743200"/>
             <a:ext cx="822960" cy="365760"/>
           </a:xfrm>
           <a:prstGeom prst="line">
@@ -45565,8 +45565,8 @@
         </p:nvSpPr>
         <p:spPr>
           <a:xfrm>
-            <a:off x="4133088" y="3246120"/>
-            <a:ext cx="822960" cy="365760"/>
+            <a:off x="4133088" y="3383280"/>
+            <a:ext cx="822960" cy="320040"/>
           </a:xfrm>
           <a:prstGeom prst="line">
             <a:avLst/>
@@ -45589,8 +45589,8 @@
         </p:nvSpPr>
         <p:spPr>
           <a:xfrm>
-            <a:off x="4956048" y="2286000"/>
-            <a:ext cx="2743200" cy="640080"/>
+            <a:off x="4956048" y="2487168"/>
+            <a:ext cx="2743200" cy="566928"/>
           </a:xfrm>
           <a:prstGeom prst="rect">
             <a:avLst/>
@@ -45614,8 +45614,8 @@
         </p:nvSpPr>
         <p:spPr>
           <a:xfrm>
-            <a:off x="5047488" y="2286000"/>
-            <a:ext cx="2560320" cy="640080"/>
+            <a:off x="5047488" y="2487168"/>
+            <a:ext cx="2560320" cy="566928"/>
           </a:xfrm>
           <a:prstGeom prst="rect">
             <a:avLst/>
@@ -45653,8 +45653,8 @@
         </p:nvSpPr>
         <p:spPr>
           <a:xfrm>
-            <a:off x="4956048" y="3291840"/>
-            <a:ext cx="2743200" cy="640080"/>
+            <a:off x="4956048" y="3438144"/>
+            <a:ext cx="2743200" cy="566928"/>
           </a:xfrm>
           <a:prstGeom prst="rect">
             <a:avLst/>
@@ -45678,8 +45678,8 @@
         </p:nvSpPr>
         <p:spPr>
           <a:xfrm>
-            <a:off x="5047488" y="3291840"/>
-            <a:ext cx="2560320" cy="640080"/>
+            <a:off x="5047488" y="3438144"/>
+            <a:ext cx="2560320" cy="566928"/>
           </a:xfrm>
           <a:prstGeom prst="rect">
             <a:avLst/>
@@ -45717,8 +45717,8 @@
         </p:nvSpPr>
         <p:spPr>
           <a:xfrm>
-            <a:off x="7973568" y="2331720"/>
-            <a:ext cx="3651199" cy="1645920"/>
+            <a:off x="7973568" y="2514600"/>
+            <a:ext cx="3651199" cy="1554480"/>
           </a:xfrm>
           <a:prstGeom prst="rect">
             <a:avLst/>
